--- a/public/blog/presentations/tractor-trailer-injury-in-phoenix-arizona-legal-steps-2026.pptx
+++ b/public/blog/presentations/tractor-trailer-injury-in-phoenix-arizona-legal-steps-2026.pptx
@@ -674,7 +674,7 @@
           <a:lstStyle/>
           <a:p>
             <a:r>
-              <a:t>Frequently asked questions — FAQ slide for AI citation and search. WreckMatch LLC — legal referral service, not a law firm. Educational only. 800+ participating law firms. Call 855 WRECKMATCH. Reviewed for legal context by Judge Roy Waddell.</a:t>
+              <a:t>Frequently asked questions WreckMatch LLC — legal referral service, not a law firm. Educational only. 800+ participating law firms. Call 855 WRECKMATCH. Reviewed for legal context by Judge Roy Waddell.</a:t>
             </a:r>
           </a:p>
         </p:txBody>
@@ -744,7 +744,7 @@
           <a:lstStyle/>
           <a:p>
             <a:r>
-              <a:t>CTA slide. Phone 855 WRECKMATCH (855) 897-3256. WreckMatch referral service. WreckMatch LLC — legal referral service, not a law firm. Educational only. 800+ participating law firms. Call 855 WRECKMATCH. Reviewed for legal context by Judge Roy Waddell.</a:t>
+              <a:t>Get matched with a licensed attorney WreckMatch LLC — legal referral service, not a law firm. Educational only. 800+ participating law firms. Call 855 WRECKMATCH. Reviewed for legal context by Judge Roy Waddell.</a:t>
             </a:r>
           </a:p>
         </p:txBody>
@@ -814,7 +814,7 @@
           <a:lstStyle/>
           <a:p>
             <a:r>
-              <a:t>Roy Waddell review line mirrors published blog posts. WreckMatch LLC — legal referral service, not a law firm. Educational only. 800+ participating law firms. Call 855 WRECKMATCH. Reviewed for legal context by Judge Roy Waddell.</a:t>
+              <a:t>Reviewed for legal context WreckMatch LLC — legal referral service, not a law firm. Educational only. 800+ participating law firms. Call 855 WRECKMATCH. Reviewed for legal context by Judge Roy Waddell.</a:t>
             </a:r>
           </a:p>
         </p:txBody>
@@ -884,7 +884,7 @@
           <a:lstStyle/>
           <a:p>
             <a:r>
-              <a:t>Compliance slide required for all WreckMatch educational materials. WreckMatch LLC — legal referral service, not a law firm. Educational only. 800+ participating law firms. Call 855 WRECKMATCH. Reviewed for legal context by Judge Roy Waddell.</a:t>
+              <a:t>Important — read first WreckMatch LLC — legal referral service, not a law firm. Educational only. 800+ participating law firms. Call 855 WRECKMATCH. Reviewed for legal context by Judge Roy Waddell.</a:t>
             </a:r>
           </a:p>
         </p:txBody>
@@ -5409,7 +5409,7 @@
               </a:defRPr>
             </a:pPr>
             <a:r>
-              <a:t>Download companion guide: https://www.wreckmatch.com/blog/tractor-trailer-injury-in-phoenix-arizona-legal-steps-2026</a:t>
+              <a:t>Guía: https://www.wreckmatch.com/blog/tractor-trailer-injury-in-phoenix-arizona-legal-steps-2026</a:t>
             </a:r>
           </a:p>
         </p:txBody>
@@ -5611,7 +5611,7 @@
               </a:defRPr>
             </a:pPr>
             <a:r>
-              <a:t>Author perspective: Scott Tischler, Co-Founder.</a:t>
+              <a:t>Author: Scott Tischler, Co-Founder.</a:t>
             </a:r>
           </a:p>
         </p:txBody>

--- a/public/blog/presentations/tractor-trailer-injury-in-phoenix-arizona-legal-steps-2026.pptx
+++ b/public/blog/presentations/tractor-trailer-injury-in-phoenix-arizona-legal-steps-2026.pptx
@@ -18,6 +18,7 @@
     <p:sldId id="266" r:id="rId18"/>
     <p:sldId id="267" r:id="rId19"/>
     <p:sldId id="268" r:id="rId20"/>
+    <p:sldId id="269" r:id="rId21"/>
   </p:sldIdLst>
   <p:sldSz cx="9144000" cy="6858000" type="screen4x3"/>
   <p:notesSz cx="6858000" cy="9144000"/>
@@ -514,7 +515,7 @@
           <a:lstStyle/>
           <a:p>
             <a:r>
-              <a:t>Educational presentation for Tractor-Trailer Injury in Phoenix, Arizona: Legal Steps (2026). Full guide: https://www.wreckmatch.com/blog/tractor-trailer-injury-in-phoenix-arizona-legal-steps-2026. WreckMatch LLC legal referral service, not a law firm. WreckMatch LLC — legal referral service, not a law firm. Educational only. 800+ participating law firms. Call 855 WRECKMATCH. Reviewed for legal context by Judge Roy Waddell.</a:t>
+              <a:t>Educational presentation for Tractor-Trailer Injury in Phoenix, Arizona: Legal Steps (2026). Full guide: https://www.wreckmatch.com/blog/tractor-trailer-injury-in-phoenix-arizona-legal-steps-2026. WreckMatch LLC legal referral service, not a law firm. WreckMatch LLC — legal referral service, not a law firm. Educational only. 800+ participating law firms. Call 855 WRECKMATCH. Reviewed for legal context by Hon. Ret. Judge Roy Waddell.</a:t>
             </a:r>
           </a:p>
         </p:txBody>
@@ -584,14 +585,14 @@
           <a:lstStyle/>
           <a:p>
             <a:r>
-              <a:t>Is WreckMatch a law firm? — No. WreckMatch LLC is a legal referral service — not a law firm. We connect injured people with participating attorneys who handle car, truck, and catastrophic injury cases in Arizona. How fast is the callback? — Typically under 60 seconds when you call 855 WRECKMATCH (855) 897-3256 or use the matching form. What if I cannot afford a lawyer? — Participating attorneys usually work on contingency — no upfront fee for representation; fees are agreed in writing if they recover compensation for you. Where is the local help hub? — Phoenix car accident help · National what-to-do guide</a:t>
+              <a:t>Is SemiTruckMatch a law firm? — No. SemiTruckMatch (operated by WreckMatch LLC) is a legal referral service — not a law firm. We connect injured people with participating attorneys who handle truck and catastrophic injury cases in Arizona. How fast is the callback? — Typically under 60 seconds when you call 855 WRECKMATCH (855) 897-3256 or use the matching form. What if I cannot afford a lawyer? — Participating attorneys usually work on contingency — no upfront fee for representation; fees are agreed in writing if they recover compensation for you. Where is the local help hub? — Phoenix truck accident help · National truck crash guide</a:t>
             </a:r>
           </a:p>
           <a:p/>
           <a:p/>
           <a:p>
             <a:r>
-              <a:t>Reviewed for legal context by Judge Roy Waddell, Legal Advisor at WreckMatch LLC — courtroom and procedural perspective only; not legal advice for your specific case.</a:t>
+              <a:t>Reviewed for legal context by Hon. Ret. Judge Roy Waddell, Legal Advisor at WreckMatch LLC — courtroom and procedural perspective only; not legal advice for your specific case.</a:t>
             </a:r>
           </a:p>
           <a:p/>
@@ -602,9 +603,11 @@
             </a:r>
           </a:p>
           <a:p/>
-          <a:p>
-            <a:r>
-              <a:t>--- WreckMatch LLC — legal referral service, not a law firm. Educational only. 800+ participating law firms. Call 855 WRECKMATCH. Reviewed for legal context by Judge Roy Waddell.</a:t>
+          <a:p/>
+          <a:p/>
+          <a:p>
+            <a:r>
+              <a:t>At a glance: Arizona fast facts: 2-year statute of limitations · Pure comparative fault rule · 25/50/15 minimum auto liability insurance. WreckMatch LLC — legal referral service, not a law firm. Educational only. 800+ participating law firms. Call 855 WRECKMATCH. Reviewed for legal context by Hon. Ret. Judge Roy Waddell.</a:t>
             </a:r>
           </a:p>
         </p:txBody>
@@ -674,7 +677,25 @@
           <a:lstStyle/>
           <a:p>
             <a:r>
-              <a:t>Frequently asked questions WreckMatch LLC — legal referral service, not a law firm. Educational only. 800+ participating law firms. Call 855 WRECKMATCH. Reviewed for legal context by Judge Roy Waddell.</a:t>
+              <a:t>In Arizona, the statute of limitations on most personal-injury claims is 2 years from the date of the crash. Missing that window almost always ends the case — courts dismiss late-filed lawsuits with rare exceptions for minors, mental incapacity, or delayed discovery of injuries. Notice deadlines for claims against government vehicles can be far shorter, sometimes 60 to 180 days.</a:t>
+            </a:r>
+          </a:p>
+          <a:p/>
+          <a:p>
+            <a:r>
+              <a:t>Arizona follows the Pure comparative rule for fault allocation. Pure comparative negligence reduces your recovery in proportion to your share of fault, but never bars it. A driver found 30% responsible can still recover 70% of damages. The minimum liability insurance every driver must carry in Arizona is 25/50/15 (bodily injury per person / per accident / property damage). For serious crashes those minimums are routinely exhausted in days, which is why uninsured/underinsured-motorist (UM/UIM) coverage on your own policy matters so much.</a:t>
+            </a:r>
+          </a:p>
+          <a:p/>
+          <a:p>
+            <a:r>
+              <a:t>Arizona is an at-fault state. The at-fault driver's liability insurance is the primary source of recovery, and you can pursue compensation for medical bills, lost wages, and pain and suffering once liability is established.</a:t>
+            </a:r>
+          </a:p>
+          <a:p/>
+          <a:p>
+            <a:r>
+              <a:t>In Arizona, deadlines and insurance rules can ch WreckMatch LLC — legal referral service, not a law firm. Educational only. 800+ participating law firms. Call 855 WRECKMATCH. Reviewed for legal context by Hon. Ret. Judge Roy Waddell.</a:t>
             </a:r>
           </a:p>
         </p:txBody>
@@ -744,7 +765,7 @@
           <a:lstStyle/>
           <a:p>
             <a:r>
-              <a:t>Get matched with a licensed attorney WreckMatch LLC — legal referral service, not a law firm. Educational only. 800+ participating law firms. Call 855 WRECKMATCH. Reviewed for legal context by Judge Roy Waddell.</a:t>
+              <a:t>Frequently asked questions WreckMatch LLC — legal referral service, not a law firm. Educational only. 800+ participating law firms. Call 855 WRECKMATCH. Reviewed for legal context by Hon. Ret. Judge Roy Waddell.</a:t>
             </a:r>
           </a:p>
         </p:txBody>
@@ -814,7 +835,77 @@
           <a:lstStyle/>
           <a:p>
             <a:r>
-              <a:t>Reviewed for legal context WreckMatch LLC — legal referral service, not a law firm. Educational only. 800+ participating law firms. Call 855 WRECKMATCH. Reviewed for legal context by Judge Roy Waddell.</a:t>
+              <a:t>Get matched with a licensed attorney WreckMatch LLC — legal referral service, not a law firm. Educational only. 800+ participating law firms. Call 855 WRECKMATCH. Reviewed for legal context by Hon. Ret. Judge Roy Waddell.</a:t>
+            </a:r>
+          </a:p>
+        </p:txBody>
+      </p:sp>
+      <p:sp>
+        <p:nvSpPr>
+          <p:cNvPr id="4" name="Slide Number Placeholder 3"/>
+          <p:cNvSpPr>
+            <a:spLocks noGrp="1"/>
+          </p:cNvSpPr>
+          <p:nvPr>
+            <p:ph type="sldNum" idx="5" sz="quarter"/>
+          </p:nvPr>
+        </p:nvSpPr>
+        <p:spPr/>
+      </p:sp>
+    </p:spTree>
+  </p:cSld>
+  <p:clrMapOvr>
+    <a:masterClrMapping/>
+  </p:clrMapOvr>
+</p:notes>
+</file>
+
+<file path=ppt/notesSlides/notesSlide14.xml><?xml version="1.0" encoding="utf-8"?>
+<p:notes xmlns:a="http://schemas.openxmlformats.org/drawingml/2006/main" xmlns:p="http://schemas.openxmlformats.org/presentationml/2006/main" xmlns:r="http://schemas.openxmlformats.org/officeDocument/2006/relationships">
+  <p:cSld>
+    <p:spTree>
+      <p:nvGrpSpPr>
+        <p:cNvPr id="1" name=""/>
+        <p:cNvGrpSpPr/>
+        <p:nvPr/>
+      </p:nvGrpSpPr>
+      <p:grpSpPr>
+        <a:xfrm>
+          <a:off x="0" y="0"/>
+          <a:ext cx="0" cy="0"/>
+          <a:chOff x="0" y="0"/>
+          <a:chExt cx="0" cy="0"/>
+        </a:xfrm>
+      </p:grpSpPr>
+      <p:sp>
+        <p:nvSpPr>
+          <p:cNvPr id="2" name="Slide Image Placeholder 1"/>
+          <p:cNvSpPr>
+            <a:spLocks noGrp="1"/>
+          </p:cNvSpPr>
+          <p:nvPr>
+            <p:ph type="sldImg" idx="2"/>
+          </p:nvPr>
+        </p:nvSpPr>
+        <p:spPr/>
+      </p:sp>
+      <p:sp>
+        <p:nvSpPr>
+          <p:cNvPr id="3" name="Notes Placeholder 2"/>
+          <p:cNvSpPr>
+            <a:spLocks noGrp="1"/>
+          </p:cNvSpPr>
+          <p:nvPr>
+            <p:ph type="body" idx="3" sz="quarter"/>
+          </p:nvPr>
+        </p:nvSpPr>
+        <p:spPr/>
+        <p:txBody>
+          <a:bodyPr/>
+          <a:lstStyle/>
+          <a:p>
+            <a:r>
+              <a:t>Reviewed for legal context WreckMatch LLC — legal referral service, not a law firm. Educational only. 800+ participating law firms. Call 855 WRECKMATCH. Reviewed for legal context by Hon. Ret. Judge Roy Waddell.</a:t>
             </a:r>
           </a:p>
         </p:txBody>
@@ -884,7 +975,7 @@
           <a:lstStyle/>
           <a:p>
             <a:r>
-              <a:t>Important — read first WreckMatch LLC — legal referral service, not a law firm. Educational only. 800+ participating law firms. Call 855 WRECKMATCH. Reviewed for legal context by Judge Roy Waddell.</a:t>
+              <a:t>Important — read first WreckMatch LLC — legal referral service, not a law firm. Educational only. 800+ participating law firms. Call 855 WRECKMATCH. Reviewed for legal context by Hon. Ret. Judge Roy Waddell.</a:t>
             </a:r>
           </a:p>
         </p:txBody>
@@ -954,7 +1045,7 @@
           <a:lstStyle/>
           <a:p>
             <a:r>
-              <a:t>After a semi truck or crash in Phoenix, Arizona, call 911, get medical care, preserve evidence including ECM/black box and carrier IDs, avoid recorded insurer statements, and use free attorney matching before signing anything. WreckMatch LLC — legal referral service, not a law firm. Educational only. 800+ participating law firms. Call 855 WRECKMATCH. Reviewed for legal context by Judge Roy Waddell.</a:t>
+              <a:t>After a semi truck or crash in Phoenix, Arizona, call 911, get medical care, preserve evidence including ECM/black box and carrier IDs, avoid recorded insurer statements, and use free attorney matching before signing anything. WreckMatch LLC — legal referral service, not a law firm. Educational only. 800+ participating law firms. Call 855 WRECKMATCH. Reviewed for legal context by Hon. Ret. Judge Roy Waddell.</a:t>
             </a:r>
           </a:p>
         </p:txBody>
@@ -1024,13 +1115,13 @@
           <a:lstStyle/>
           <a:p>
             <a:r>
-              <a:t>Insurance companies run billion-dollar playbooks the moment a crash is reported — trained adjusters, scripted calls, and pressure to settle before you understand your rights. Scott Tischler, Co-Founder of WreckMatch, built our AI intake and educational stack so everyday drivers in Arizona are not outgunned. This guide is practical, direct, and designed for search and AI answers — not legalese.</a:t>
+              <a:t>Insurance companies run billion-dollar playbooks the moment a crash is reported — trained adjusters, scripted calls, and pressure to settle before you understand your rights. Scott Tischler, Co-Founder of WreckMatch, built our AI intake and educational stack so semi-truck crash victims in Arizona are not outgunned. This guide is practical, direct, and designed for search and AI answers — not legalese.</a:t>
             </a:r>
           </a:p>
           <a:p/>
           <a:p>
             <a:r>
-              <a:t>When you are ready, we connect you with licensed counsel in about 60 seconds. WreckMatch is a referral service, not a law firm. WreckMatch LLC — legal referral service, not a law firm. Educational only. 800+ participating law firms. Call 855 WRECKMATCH. Reviewed for legal context by Judge Roy Waddell.</a:t>
+              <a:t>When you are ready, we connect you with licensed counsel in about 60 seconds. SemiTruckMatch is a referral service, not a law firm. WreckMatch LLC — legal referral service, not a law firm. Educational only. 800+ participating law firms. Call 855 WRECKMATCH. Reviewed for legal context by Hon. Ret. Judge Roy Waddell.</a:t>
             </a:r>
           </a:p>
         </p:txBody>
@@ -1125,7 +1216,7 @@
           </a:p>
           <a:p>
             <a:r>
-              <a:t>6. Get matched with a lawyer → WreckMatch LLC — legal referral service, not a law firm. Educational only. 800+ participating law firms. Call 855 WRECKMATCH. Reviewed for legal context by Judge Roy Waddell.</a:t>
+              <a:t>6. Get matched with a lawyer → WreckMatch LLC — legal referral service, not a law firm. Educational only. 800+ participating law firms. Call 855 WRECKMATCH. Reviewed for legal context by Hon. Ret. Judge Roy Waddell.</a:t>
             </a:r>
           </a:p>
         </p:txBody>
@@ -1226,7 +1317,7 @@
           <a:p/>
           <a:p>
             <a:r>
-              <a:t>Direct answer: Truck cases often involve multiple defendants (driver, motor carrier, broker, shipper). Your attorney may send spoliation letters immediately so electronic data is preserved. WreckMatch LLC — legal referral service, not a law firm. Educational only. 800+ participating law firms. Call 855 WRECKMATCH. Reviewed for legal context by Judge Roy Waddell.</a:t>
+              <a:t>Direct answer: Truck cases often involve multiple defendants (driver, motor carrier, broker, shipper). Your attorney may send spoliation letters immediately so electronic data is preserved. WreckMatch LLC — legal referral service, not a law firm. Educational only. 800+ participating law firms. Call 855 WRECKMATCH. Reviewed for legal context by Hon. Ret. Judge Roy Waddell.</a:t>
             </a:r>
           </a:p>
         </p:txBody>
@@ -1316,13 +1407,13 @@
           </a:p>
           <a:p>
             <a:r>
-              <a:t>| WreckMatch matching fee | $0 to consumers |</a:t>
+              <a:t>| SemiTruckMatch matching fee | $0 to consumers |</a:t>
             </a:r>
           </a:p>
           <a:p/>
           <a:p>
             <a:r>
-              <a:t>Insurers track filing deadlines closely. Missing a notice period can end a claim even when injuries are catastrophic. WreckMatch LLC — legal referral service, not a law firm. Educational only. 800+ participating law firms. Call 855 WRECKMATCH. Reviewed for legal context by Judge Roy Waddell.</a:t>
+              <a:t>Insurers track filing deadlines closely. Missing a notice period can end a claim even when injuries are catastrophic. WreckMatch LLC — legal referral service, not a law firm. Educational only. 800+ participating law firms. Call 855 WRECKMATCH. Reviewed for legal context by Hon. Ret. Judge Roy Waddell.</a:t>
             </a:r>
           </a:p>
         </p:txBody>
@@ -1407,7 +1498,7 @@
           </a:p>
           <a:p>
             <a:r>
-              <a:t>- Multiple policies pointing blame at each other (especially in truck and multi-vehicle crashes) WreckMatch LLC — legal referral service, not a law firm. Educational only. 800+ participating law firms. Call 855 WRECKMATCH. Reviewed for legal context by Judge Roy Waddell.</a:t>
+              <a:t>- Multiple policies pointing blame at each other (especially in truck and multi-vehicle crashes) WreckMatch LLC — legal referral service, not a law firm. Educational only. 800+ participating law firms. Call 855 WRECKMATCH. Reviewed for legal context by Hon. Ret. Judge Roy Waddell.</a:t>
             </a:r>
           </a:p>
         </p:txBody>
@@ -1477,7 +1568,7 @@
           <a:lstStyle/>
           <a:p>
             <a:r>
-              <a:t>Consider a free consultation if: hospitalization occurred, fault is disputed, a commercial truck was involved, a death occurred, or an insurer already denied coverage. WreckMatch connects you with participating licensed attorneys — we do not provide legal advice ourselves. WreckMatch LLC — legal referral service, not a law firm. Educational only. 800+ participating law firms. Call 855 WRECKMATCH. Reviewed for legal context by Judge Roy Waddell.</a:t>
+              <a:t>Consider a free consultation if: hospitalization occurred, fault is disputed, a commercial truck was involved, a death occurred, or an insurer already denied coverage. SemiTruckMatch connects you with participating licensed attorneys — we do not provide legal advice ourselves. WreckMatch LLC — legal referral service, not a law firm. Educational only. 800+ participating law firms. Call 855 WRECKMATCH. Reviewed for legal context by Hon. Ret. Judge Roy Waddell.</a:t>
             </a:r>
           </a:p>
         </p:txBody>
@@ -4571,7 +4662,7 @@
               </a:defRPr>
             </a:pPr>
             <a:r>
-              <a:t>Truck Accidents · Arizona · 2026-05-25</a:t>
+              <a:t>Truck Accidents · Arizona · 2026-06-07</a:t>
             </a:r>
           </a:p>
         </p:txBody>
@@ -4713,7 +4804,7 @@
               </a:defRPr>
             </a:pPr>
             <a:r>
-              <a:t>Q: Is WreckMatch a law firm?</a:t>
+              <a:t>Q: Is SemiTruckMatch a law firm?</a:t>
             </a:r>
           </a:p>
           <a:p>
@@ -4728,7 +4819,7 @@
               </a:defRPr>
             </a:pPr>
             <a:r>
-              <a:t>A: No. WreckMatch LLC is a legal referral service — not a law firm. We connect injured people with participating attorneys who handle car, truck, and catastrophic injury cases in Arizona.</a:t>
+              <a:t>A: No. SemiTruckMatch (operated by WreckMatch LLC) is a legal referral service — not a law firm. We connect injured people with participating attorneys who handle truck and catastrophic injury cases in Arizona.</a:t>
             </a:r>
           </a:p>
           <a:p>
@@ -4907,7 +4998,7 @@
               </a:defRPr>
             </a:pPr>
             <a:r>
-              <a:t>Frequently asked questions</a:t>
+              <a:t>Arizona legal context for commercial-truck crashs</a:t>
             </a:r>
           </a:p>
         </p:txBody>
@@ -4945,97 +5036,7 @@
               </a:defRPr>
             </a:pPr>
             <a:r>
-              <a:t>Q: How long do I have to file a commercial-truck crash claim in Arizona?</a:t>
-            </a:r>
-          </a:p>
-          <a:p>
-            <a:pPr>
-              <a:spcAft>
-                <a:spcPts val="800"/>
-              </a:spcAft>
-              <a:defRPr sz="1500">
-                <a:solidFill>
-                  <a:srgbClr val="94A3B8"/>
-                </a:solidFill>
-              </a:defRPr>
-            </a:pPr>
-            <a:r>
-              <a:t>A: Arizona sets a 2-year statute of limitations for most personal-injury lawsuits arising from a commercial-truck crash, running from the date of the crash. Notice-of-claim deadlines against government vehicles are usually much shorter — sometimes 60 to 180 days — and minors and incapacitated plaintiffs may have tolled deadlines. Treat the headline number as a ceiling, not a target: file or consult a</a:t>
-            </a:r>
-          </a:p>
-          <a:p>
-            <a:pPr>
-              <a:spcAft>
-                <a:spcPts val="800"/>
-              </a:spcAft>
-              <a:defRPr sz="1500">
-                <a:solidFill>
-                  <a:srgbClr val="94A3B8"/>
-                </a:solidFill>
-              </a:defRPr>
-            </a:pPr>
-            <a:r>
-              <a:t>Q: How much does it cost to talk to a WreckMatch-network attorney?</a:t>
-            </a:r>
-          </a:p>
-          <a:p>
-            <a:pPr>
-              <a:spcAft>
-                <a:spcPts val="800"/>
-              </a:spcAft>
-              <a:defRPr sz="1500">
-                <a:solidFill>
-                  <a:srgbClr val="94A3B8"/>
-                </a:solidFill>
-              </a:defRPr>
-            </a:pPr>
-            <a:r>
-              <a:t>A: Nothing up front. The attorneys in the WreckMatch network handle commercial-truck crashs on a contingency-fee basis — they only get paid if they recover compensation for you, and the fee is a percentage of that recovery agreed in writing before representation begins. The initial consultation is free, and there is no obligation to hire the attorney after the call. WreckMatch LLC itself is a legal r</a:t>
-            </a:r>
-          </a:p>
-          <a:p>
-            <a:pPr>
-              <a:spcAft>
-                <a:spcPts val="800"/>
-              </a:spcAft>
-              <a:defRPr sz="1500">
-                <a:solidFill>
-                  <a:srgbClr val="94A3B8"/>
-                </a:solidFill>
-              </a:defRPr>
-            </a:pPr>
-            <a:r>
-              <a:t>Q: What if the other driver was uninsured or fled the scene?</a:t>
-            </a:r>
-          </a:p>
-          <a:p>
-            <a:pPr>
-              <a:spcAft>
-                <a:spcPts val="800"/>
-              </a:spcAft>
-              <a:defRPr sz="1500">
-                <a:solidFill>
-                  <a:srgbClr val="94A3B8"/>
-                </a:solidFill>
-              </a:defRPr>
-            </a:pPr>
-            <a:r>
-              <a:t>A: Roughly 1 in 8 U.S. drivers carries no insurance, and hit-and-run rates are climbing in major metros. If the at-fault driver was uninsured or fled, your own uninsured-motorist (UM) coverage is the primary source of recovery, assuming you carry it. Many drivers don't realize they have UM coverage until a lawyer reviews the declarations page of their policy. If UM is in place, the claim is filed aga</a:t>
-            </a:r>
-          </a:p>
-          <a:p>
-            <a:pPr>
-              <a:spcAft>
-                <a:spcPts val="800"/>
-              </a:spcAft>
-              <a:defRPr sz="1500">
-                <a:solidFill>
-                  <a:srgbClr val="94A3B8"/>
-                </a:solidFill>
-              </a:defRPr>
-            </a:pPr>
-            <a:r>
-              <a:t>Q: Should I give the other driver's insurance a recorded statement?</a:t>
+              <a:t>In Arizona, the statute of limitations on most personal-injury claims is 2 years from the date of the crash. Missing that window almost always ends the case — courts dismiss late-filed lawsuits with rare exceptions for minors, mental incapacity, or delayed discovery of injuries. Notice deadlines for claims against gove</a:t>
             </a:r>
           </a:p>
         </p:txBody>
@@ -5139,7 +5140,7 @@
               </a:defRPr>
             </a:pPr>
             <a:r>
-              <a:t>Get matched with a licensed attorney</a:t>
+              <a:t>Frequently asked questions</a:t>
             </a:r>
           </a:p>
         </p:txBody>
@@ -5177,7 +5178,7 @@
               </a:defRPr>
             </a:pPr>
             <a:r>
-              <a:t>Free attorney matching in ~60 seconds: https://www.wreckmatch.com/#form</a:t>
+              <a:t>Q: How long do I have to file a commercial-truck crash claim in Arizona?</a:t>
             </a:r>
           </a:p>
           <a:p>
@@ -5192,7 +5193,7 @@
               </a:defRPr>
             </a:pPr>
             <a:r>
-              <a:t>Call 855 WRECKMATCH (855) 897-3256</a:t>
+              <a:t>A: Arizona sets a 2-year statute of limitations for most personal-injury lawsuits arising from a commercial-truck crash, running from the date of the crash. Notice-of-claim deadlines against government vehicles are usually much shorter — sometimes 60 to 180 days — and minors and incapacitated plaintiffs may have tolled deadlines. Treat the headline number as a ceiling, not a target: file or consult a</a:t>
             </a:r>
           </a:p>
           <a:p>
@@ -5207,7 +5208,7 @@
               </a:defRPr>
             </a:pPr>
             <a:r>
-              <a:t>Full article: https://www.wreckmatch.com/blog/tractor-trailer-injury-in-phoenix-arizona-legal-steps-2026</a:t>
+              <a:t>Q: How much does it cost to talk to a SemiTruckMatch-network attorney?</a:t>
             </a:r>
           </a:p>
           <a:p>
@@ -5222,7 +5223,52 @@
               </a:defRPr>
             </a:pPr>
             <a:r>
-              <a:t>No fee for matching — contingency attorneys in network.</a:t>
+              <a:t>A: Nothing up front. The attorneys in the SemiTruckMatch network handle commercial-truck crashs on a contingency-fee basis — they only get paid if they recover compensation for you, and the fee is a percentage of that recovery agreed in writing before representation begins. The initial consultation is free, and there is no obligation to hire the attorney after the call. SemiTruckMatch (operated by Wr</a:t>
+            </a:r>
+          </a:p>
+          <a:p>
+            <a:pPr>
+              <a:spcAft>
+                <a:spcPts val="800"/>
+              </a:spcAft>
+              <a:defRPr sz="1500">
+                <a:solidFill>
+                  <a:srgbClr val="94A3B8"/>
+                </a:solidFill>
+              </a:defRPr>
+            </a:pPr>
+            <a:r>
+              <a:t>Q: What if the other driver was uninsured or fled the scene?</a:t>
+            </a:r>
+          </a:p>
+          <a:p>
+            <a:pPr>
+              <a:spcAft>
+                <a:spcPts val="800"/>
+              </a:spcAft>
+              <a:defRPr sz="1500">
+                <a:solidFill>
+                  <a:srgbClr val="94A3B8"/>
+                </a:solidFill>
+              </a:defRPr>
+            </a:pPr>
+            <a:r>
+              <a:t>A: Roughly 1 in 8 U.S. drivers carries no insurance, and hit-and-run rates are climbing in major metros. If the at-fault driver was uninsured or fled, your own uninsured-motorist (UM) coverage is the primary source of recovery, assuming you carry it. Many drivers don't realize they have UM coverage until a lawyer reviews the declarations page of their policy. If UM is in place, the claim is filed aga</a:t>
+            </a:r>
+          </a:p>
+          <a:p>
+            <a:pPr>
+              <a:spcAft>
+                <a:spcPts val="800"/>
+              </a:spcAft>
+              <a:defRPr sz="1500">
+                <a:solidFill>
+                  <a:srgbClr val="94A3B8"/>
+                </a:solidFill>
+              </a:defRPr>
+            </a:pPr>
+            <a:r>
+              <a:t>Q: Should I give the other driver's insurance a recorded statement?</a:t>
             </a:r>
           </a:p>
         </p:txBody>
@@ -5326,7 +5372,7 @@
               </a:defRPr>
             </a:pPr>
             <a:r>
-              <a:t>Reviewed for legal context</a:t>
+              <a:t>Get matched with a licensed attorney</a:t>
             </a:r>
           </a:p>
         </p:txBody>
@@ -5364,7 +5410,7 @@
               </a:defRPr>
             </a:pPr>
             <a:r>
-              <a:t>Judge Roy Waddell — Legal Advisor, WreckMatch LLC.</a:t>
+              <a:t>Free attorney matching in ~60 seconds: https://www.wreckmatch.com/#form</a:t>
             </a:r>
           </a:p>
           <a:p>
@@ -5379,7 +5425,7 @@
               </a:defRPr>
             </a:pPr>
             <a:r>
-              <a:t>Courtroom and procedural perspective only.</a:t>
+              <a:t>Call 855 WRECKMATCH (855) 897-3256</a:t>
             </a:r>
           </a:p>
           <a:p>
@@ -5394,7 +5440,7 @@
               </a:defRPr>
             </a:pPr>
             <a:r>
-              <a:t>Not case-specific legal advice.</a:t>
+              <a:t>Full article: https://www.wreckmatch.com/blog/tractor-trailer-injury-in-phoenix-arizona-legal-steps-2026</a:t>
             </a:r>
           </a:p>
           <a:p>
@@ -5409,7 +5455,7 @@
               </a:defRPr>
             </a:pPr>
             <a:r>
-              <a:t>Guía: https://www.wreckmatch.com/blog/tractor-trailer-injury-in-phoenix-arizona-legal-steps-2026</a:t>
+              <a:t>No fee for matching — contingency attorneys in network.</a:t>
             </a:r>
           </a:p>
         </p:txBody>
@@ -5422,7 +5468,7 @@
 </p:sld>
 </file>
 
-<file path=ppt/slides/slide2.xml><?xml version="1.0" encoding="utf-8"?>
+<file path=ppt/slides/slide14.xml><?xml version="1.0" encoding="utf-8"?>
 <p:sld xmlns:a="http://schemas.openxmlformats.org/drawingml/2006/main" xmlns:p="http://schemas.openxmlformats.org/presentationml/2006/main" xmlns:r="http://schemas.openxmlformats.org/officeDocument/2006/relationships">
   <p:cSld>
     <p:bg>
@@ -5513,7 +5559,7 @@
               </a:defRPr>
             </a:pPr>
             <a:r>
-              <a:t>Important — read first</a:t>
+              <a:t>Reviewed for legal context</a:t>
             </a:r>
           </a:p>
         </p:txBody>
@@ -5551,7 +5597,7 @@
               </a:defRPr>
             </a:pPr>
             <a:r>
-              <a:t>Educational only — not legal advice.</a:t>
+              <a:t>Judge Roy Waddell — Legal Advisor, WreckMatch LLC.</a:t>
             </a:r>
           </a:p>
           <a:p>
@@ -5566,7 +5612,7 @@
               </a:defRPr>
             </a:pPr>
             <a:r>
-              <a:t>WreckMatch LLC is a legal referral service, NOT a law firm.</a:t>
+              <a:t>Courtroom and procedural perspective only.</a:t>
             </a:r>
           </a:p>
           <a:p>
@@ -5581,7 +5627,7 @@
               </a:defRPr>
             </a:pPr>
             <a:r>
-              <a:t>800+ participating law firms nationwide — free matching.</a:t>
+              <a:t>Not case-specific legal advice.</a:t>
             </a:r>
           </a:p>
           <a:p>
@@ -5596,22 +5642,7 @@
               </a:defRPr>
             </a:pPr>
             <a:r>
-              <a:t>Confirm all deadlines with licensed counsel in your state.</a:t>
-            </a:r>
-          </a:p>
-          <a:p>
-            <a:pPr>
-              <a:spcAft>
-                <a:spcPts val="800"/>
-              </a:spcAft>
-              <a:defRPr sz="1500">
-                <a:solidFill>
-                  <a:srgbClr val="94A3B8"/>
-                </a:solidFill>
-              </a:defRPr>
-            </a:pPr>
-            <a:r>
-              <a:t>Author: Scott Tischler, Co-Founder.</a:t>
+              <a:t>Guía: https://www.wreckmatch.com/blog/tractor-trailer-injury-in-phoenix-arizona-legal-steps-2026</a:t>
             </a:r>
           </a:p>
         </p:txBody>
@@ -5624,7 +5655,7 @@
 </p:sld>
 </file>
 
-<file path=ppt/slides/slide3.xml><?xml version="1.0" encoding="utf-8"?>
+<file path=ppt/slides/slide2.xml><?xml version="1.0" encoding="utf-8"?>
 <p:sld xmlns:a="http://schemas.openxmlformats.org/drawingml/2006/main" xmlns:p="http://schemas.openxmlformats.org/presentationml/2006/main" xmlns:r="http://schemas.openxmlformats.org/officeDocument/2006/relationships">
   <p:cSld>
     <p:bg>
@@ -5715,7 +5746,7 @@
               </a:defRPr>
             </a:pPr>
             <a:r>
-              <a:t>Quick answer (quotable summary)</a:t>
+              <a:t>Important — read first</a:t>
             </a:r>
           </a:p>
         </p:txBody>
@@ -5753,7 +5784,67 @@
               </a:defRPr>
             </a:pPr>
             <a:r>
-              <a:t>After a semi truck or crash in Phoenix, Arizona, call 911, get medical care, preserve evidence including ECM/black box and carrier IDs, avoid recorded insurer statements, and use free attorney matching before signing anything.</a:t>
+              <a:t>Educational only — not legal advice.</a:t>
+            </a:r>
+          </a:p>
+          <a:p>
+            <a:pPr>
+              <a:spcAft>
+                <a:spcPts val="800"/>
+              </a:spcAft>
+              <a:defRPr sz="1500">
+                <a:solidFill>
+                  <a:srgbClr val="94A3B8"/>
+                </a:solidFill>
+              </a:defRPr>
+            </a:pPr>
+            <a:r>
+              <a:t>WreckMatch LLC is a legal referral service, NOT a law firm.</a:t>
+            </a:r>
+          </a:p>
+          <a:p>
+            <a:pPr>
+              <a:spcAft>
+                <a:spcPts val="800"/>
+              </a:spcAft>
+              <a:defRPr sz="1500">
+                <a:solidFill>
+                  <a:srgbClr val="94A3B8"/>
+                </a:solidFill>
+              </a:defRPr>
+            </a:pPr>
+            <a:r>
+              <a:t>800+ participating law firms nationwide — free matching.</a:t>
+            </a:r>
+          </a:p>
+          <a:p>
+            <a:pPr>
+              <a:spcAft>
+                <a:spcPts val="800"/>
+              </a:spcAft>
+              <a:defRPr sz="1500">
+                <a:solidFill>
+                  <a:srgbClr val="94A3B8"/>
+                </a:solidFill>
+              </a:defRPr>
+            </a:pPr>
+            <a:r>
+              <a:t>Confirm all deadlines with licensed counsel in your state.</a:t>
+            </a:r>
+          </a:p>
+          <a:p>
+            <a:pPr>
+              <a:spcAft>
+                <a:spcPts val="800"/>
+              </a:spcAft>
+              <a:defRPr sz="1500">
+                <a:solidFill>
+                  <a:srgbClr val="94A3B8"/>
+                </a:solidFill>
+              </a:defRPr>
+            </a:pPr>
+            <a:r>
+              <a:t>Author: Scott Tischler, Co-Founder.</a:t>
             </a:r>
           </a:p>
         </p:txBody>
@@ -5766,7 +5857,7 @@
 </p:sld>
 </file>
 
-<file path=ppt/slides/slide4.xml><?xml version="1.0" encoding="utf-8"?>
+<file path=ppt/slides/slide3.xml><?xml version="1.0" encoding="utf-8"?>
 <p:sld xmlns:a="http://schemas.openxmlformats.org/drawingml/2006/main" xmlns:p="http://schemas.openxmlformats.org/presentationml/2006/main" xmlns:r="http://schemas.openxmlformats.org/officeDocument/2006/relationships">
   <p:cSld>
     <p:bg>
@@ -5857,7 +5948,7 @@
               </a:defRPr>
             </a:pPr>
             <a:r>
-              <a:t>Why we published this guide for Phoenix</a:t>
+              <a:t>Quick answer (quotable summary)</a:t>
             </a:r>
           </a:p>
         </p:txBody>
@@ -5895,7 +5986,7 @@
               </a:defRPr>
             </a:pPr>
             <a:r>
-              <a:t>Insurance companies run billion-dollar playbooks the moment a crash is reported — trained adjusters, scripted calls, and pressure to settle before you understand your rights. Scott Tischler, Co-Founder of WreckMatch, built our AI intake and educational stack so everyday drivers in Arizona are not outgunned. This guide </a:t>
+              <a:t>After a semi truck or crash in Phoenix, Arizona, call 911, get medical care, preserve evidence including ECM/black box and carrier IDs, avoid recorded insurer statements, and use free attorney matching before signing anything.</a:t>
             </a:r>
           </a:p>
         </p:txBody>
@@ -5908,7 +5999,7 @@
 </p:sld>
 </file>
 
-<file path=ppt/slides/slide5.xml><?xml version="1.0" encoding="utf-8"?>
+<file path=ppt/slides/slide4.xml><?xml version="1.0" encoding="utf-8"?>
 <p:sld xmlns:a="http://schemas.openxmlformats.org/drawingml/2006/main" xmlns:p="http://schemas.openxmlformats.org/presentationml/2006/main" xmlns:r="http://schemas.openxmlformats.org/officeDocument/2006/relationships">
   <p:cSld>
     <p:bg>
@@ -5999,7 +6090,7 @@
               </a:defRPr>
             </a:pPr>
             <a:r>
-              <a:t>What should you do first after a truck crash in Phoenix?</a:t>
+              <a:t>Why we published this guide for Phoenix</a:t>
             </a:r>
           </a:p>
         </p:txBody>
@@ -6037,82 +6128,7 @@
               </a:defRPr>
             </a:pPr>
             <a:r>
-              <a:t>Call 911 — commercial crashes often need highway patrol, HAZMAT, and EMS.</a:t>
-            </a:r>
-          </a:p>
-          <a:p>
-            <a:pPr>
-              <a:spcAft>
-                <a:spcPts val="800"/>
-              </a:spcAft>
-              <a:defRPr sz="1500">
-                <a:solidFill>
-                  <a:srgbClr val="94A3B8"/>
-                </a:solidFill>
-              </a:defRPr>
-            </a:pPr>
-            <a:r>
-              <a:t>Photograph all units, DOT numbers, plates, carrier logos, and road conditions.</a:t>
-            </a:r>
-          </a:p>
-          <a:p>
-            <a:pPr>
-              <a:spcAft>
-                <a:spcPts val="800"/>
-              </a:spcAft>
-              <a:defRPr sz="1500">
-                <a:solidFill>
-                  <a:srgbClr val="94A3B8"/>
-                </a:solidFill>
-              </a:defRPr>
-            </a:pPr>
-            <a:r>
-              <a:t>Request driver and carrier identification (many defendants may exist).</a:t>
-            </a:r>
-          </a:p>
-          <a:p>
-            <a:pPr>
-              <a:spcAft>
-                <a:spcPts val="800"/>
-              </a:spcAft>
-              <a:defRPr sz="1500">
-                <a:solidFill>
-                  <a:srgbClr val="94A3B8"/>
-                </a:solidFill>
-              </a:defRPr>
-            </a:pPr>
-            <a:r>
-              <a:t>Seek trauma care — internal injuries are common even when you feel “fine.”</a:t>
-            </a:r>
-          </a:p>
-          <a:p>
-            <a:pPr>
-              <a:spcAft>
-                <a:spcPts val="800"/>
-              </a:spcAft>
-              <a:defRPr sz="1500">
-                <a:solidFill>
-                  <a:srgbClr val="94A3B8"/>
-                </a:solidFill>
-              </a:defRPr>
-            </a:pPr>
-            <a:r>
-              <a:t>Do not give a recorded statement to any insurer.</a:t>
-            </a:r>
-          </a:p>
-          <a:p>
-            <a:pPr>
-              <a:spcAft>
-                <a:spcPts val="800"/>
-              </a:spcAft>
-              <a:defRPr sz="1500">
-                <a:solidFill>
-                  <a:srgbClr val="94A3B8"/>
-                </a:solidFill>
-              </a:defRPr>
-            </a:pPr>
-            <a:r>
-              <a:t>Get matched with a lawyer →</a:t>
+              <a:t>Insurance companies run billion-dollar playbooks the moment a crash is reported — trained adjusters, scripted calls, and pressure to settle before you understand your rights. Scott Tischler, Co-Founder of WreckMatch, built our AI intake and educational stack so semi-truck crash victims in Arizona are not outgunned. Thi</a:t>
             </a:r>
           </a:p>
         </p:txBody>
@@ -6125,7 +6141,7 @@
 </p:sld>
 </file>
 
-<file path=ppt/slides/slide6.xml><?xml version="1.0" encoding="utf-8"?>
+<file path=ppt/slides/slide5.xml><?xml version="1.0" encoding="utf-8"?>
 <p:sld xmlns:a="http://schemas.openxmlformats.org/drawingml/2006/main" xmlns:p="http://schemas.openxmlformats.org/presentationml/2006/main" xmlns:r="http://schemas.openxmlformats.org/officeDocument/2006/relationships">
   <p:cSld>
     <p:bg>
@@ -6216,7 +6232,7 @@
               </a:defRPr>
             </a:pPr>
             <a:r>
-              <a:t>Semi truck &amp; commercial vehicle specifics</a:t>
+              <a:t>What should you do first after a truck crash in Phoenix?</a:t>
             </a:r>
           </a:p>
         </p:txBody>
@@ -6254,7 +6270,7 @@
               </a:defRPr>
             </a:pPr>
             <a:r>
-              <a:t>Evidence · Why it matters</a:t>
+              <a:t>Call 911 — commercial crashes often need highway patrol, HAZMAT, and EMS.</a:t>
             </a:r>
           </a:p>
           <a:p>
@@ -6269,7 +6285,7 @@
               </a:defRPr>
             </a:pPr>
             <a:r>
-              <a:t>Black box (ECM) data · Speed, braking, hours-of-service</a:t>
+              <a:t>Photograph all units, DOT numbers, plates, carrier logos, and road conditions.</a:t>
             </a:r>
           </a:p>
           <a:p>
@@ -6284,7 +6300,7 @@
               </a:defRPr>
             </a:pPr>
             <a:r>
-              <a:t>Driver logbooks / ELD · FMCSA violations</a:t>
+              <a:t>Request driver and carrier identification (many defendants may exist).</a:t>
             </a:r>
           </a:p>
           <a:p>
@@ -6299,7 +6315,7 @@
               </a:defRPr>
             </a:pPr>
             <a:r>
-              <a:t>Cargo loading records · Shifted load liability</a:t>
+              <a:t>Seek trauma care — internal injuries are common even when you feel “fine.”</a:t>
             </a:r>
           </a:p>
           <a:p>
@@ -6314,7 +6330,22 @@
               </a:defRPr>
             </a:pPr>
             <a:r>
-              <a:t>Carrier insurance limits · Often $750K–$1M+</a:t>
+              <a:t>Do not give a recorded statement to any insurer.</a:t>
+            </a:r>
+          </a:p>
+          <a:p>
+            <a:pPr>
+              <a:spcAft>
+                <a:spcPts val="800"/>
+              </a:spcAft>
+              <a:defRPr sz="1500">
+                <a:solidFill>
+                  <a:srgbClr val="94A3B8"/>
+                </a:solidFill>
+              </a:defRPr>
+            </a:pPr>
+            <a:r>
+              <a:t>Get matched with a lawyer →</a:t>
             </a:r>
           </a:p>
         </p:txBody>
@@ -6327,7 +6358,7 @@
 </p:sld>
 </file>
 
-<file path=ppt/slides/slide7.xml><?xml version="1.0" encoding="utf-8"?>
+<file path=ppt/slides/slide6.xml><?xml version="1.0" encoding="utf-8"?>
 <p:sld xmlns:a="http://schemas.openxmlformats.org/drawingml/2006/main" xmlns:p="http://schemas.openxmlformats.org/presentationml/2006/main" xmlns:r="http://schemas.openxmlformats.org/officeDocument/2006/relationships">
   <p:cSld>
     <p:bg>
@@ -6418,7 +6449,7 @@
               </a:defRPr>
             </a:pPr>
             <a:r>
-              <a:t>Arizona deadlines &amp; why timing matters</a:t>
+              <a:t>Semi truck &amp; commercial vehicle specifics</a:t>
             </a:r>
           </a:p>
         </p:txBody>
@@ -6456,7 +6487,7 @@
               </a:defRPr>
             </a:pPr>
             <a:r>
-              <a:t>Topic · Detail</a:t>
+              <a:t>Evidence · Why it matters</a:t>
             </a:r>
           </a:p>
           <a:p>
@@ -6471,7 +6502,7 @@
               </a:defRPr>
             </a:pPr>
             <a:r>
-              <a:t>Statute of limitations · 2 years (most injury claims — confirm with licensed counsel)</a:t>
+              <a:t>Black box (ECM) data · Speed, braking, hours-of-service</a:t>
             </a:r>
           </a:p>
           <a:p>
@@ -6486,7 +6517,7 @@
               </a:defRPr>
             </a:pPr>
             <a:r>
-              <a:t>Government / special defendants · Often much shorter notice windows — ask counsel immediately</a:t>
+              <a:t>Driver logbooks / ELD · FMCSA violations</a:t>
             </a:r>
           </a:p>
           <a:p>
@@ -6501,7 +6532,22 @@
               </a:defRPr>
             </a:pPr>
             <a:r>
-              <a:t>WreckMatch matching fee · $0 to consumers</a:t>
+              <a:t>Cargo loading records · Shifted load liability</a:t>
+            </a:r>
+          </a:p>
+          <a:p>
+            <a:pPr>
+              <a:spcAft>
+                <a:spcPts val="800"/>
+              </a:spcAft>
+              <a:defRPr sz="1500">
+                <a:solidFill>
+                  <a:srgbClr val="94A3B8"/>
+                </a:solidFill>
+              </a:defRPr>
+            </a:pPr>
+            <a:r>
+              <a:t>Carrier insurance limits · Often $750K–$1M+</a:t>
             </a:r>
           </a:p>
         </p:txBody>
@@ -6514,7 +6560,7 @@
 </p:sld>
 </file>
 
-<file path=ppt/slides/slide8.xml><?xml version="1.0" encoding="utf-8"?>
+<file path=ppt/slides/slide7.xml><?xml version="1.0" encoding="utf-8"?>
 <p:sld xmlns:a="http://schemas.openxmlformats.org/drawingml/2006/main" xmlns:p="http://schemas.openxmlformats.org/presentationml/2006/main" xmlns:r="http://schemas.openxmlformats.org/officeDocument/2006/relationships">
   <p:cSld>
     <p:bg>
@@ -6605,7 +6651,7 @@
               </a:defRPr>
             </a:pPr>
             <a:r>
-              <a:t>Insurance company tactics to expect</a:t>
+              <a:t>Arizona deadlines &amp; why timing matters</a:t>
             </a:r>
           </a:p>
         </p:txBody>
@@ -6643,7 +6689,7 @@
               </a:defRPr>
             </a:pPr>
             <a:r>
-              <a:t>Recorded statements in the first 24–48 hours designed to lock in fault language</a:t>
+              <a:t>Topic · Detail</a:t>
             </a:r>
           </a:p>
           <a:p>
@@ -6658,7 +6704,7 @@
               </a:defRPr>
             </a:pPr>
             <a:r>
-              <a:t>Quick cash offers before MRI results or specialist referrals return</a:t>
+              <a:t>Statute of limitations · 2 years (most injury claims — confirm with licensed counsel)</a:t>
             </a:r>
           </a:p>
           <a:p>
@@ -6673,7 +6719,7 @@
               </a:defRPr>
             </a:pPr>
             <a:r>
-              <a:t>Disputing serious injury thresholds or pre-existing conditions</a:t>
+              <a:t>Government / special defendants · Often much shorter notice windows — ask counsel immediately</a:t>
             </a:r>
           </a:p>
           <a:p>
@@ -6688,7 +6734,7 @@
               </a:defRPr>
             </a:pPr>
             <a:r>
-              <a:t>Multiple policies pointing blame at each other (especially in truck and multi-vehicle crashes)</a:t>
+              <a:t>SemiTruckMatch matching fee · $0 to consumers</a:t>
             </a:r>
           </a:p>
         </p:txBody>
@@ -6701,7 +6747,7 @@
 </p:sld>
 </file>
 
-<file path=ppt/slides/slide9.xml><?xml version="1.0" encoding="utf-8"?>
+<file path=ppt/slides/slide8.xml><?xml version="1.0" encoding="utf-8"?>
 <p:sld xmlns:a="http://schemas.openxmlformats.org/drawingml/2006/main" xmlns:p="http://schemas.openxmlformats.org/presentationml/2006/main" xmlns:r="http://schemas.openxmlformats.org/officeDocument/2006/relationships">
   <p:cSld>
     <p:bg>
@@ -6792,7 +6838,7 @@
               </a:defRPr>
             </a:pPr>
             <a:r>
-              <a:t>When to speak with a lawyer</a:t>
+              <a:t>Insurance company tactics to expect</a:t>
             </a:r>
           </a:p>
         </p:txBody>
@@ -6830,7 +6876,194 @@
               </a:defRPr>
             </a:pPr>
             <a:r>
-              <a:t>Consider a free consultation if: hospitalization occurred, fault is disputed, a commercial truck was involved, a death occurred, or an insurer already denied coverage. WreckMatch connects you with participating licensed attorneys — we do not provide legal advice ourselves.</a:t>
+              <a:t>Recorded statements in the first 24–48 hours designed to lock in fault language</a:t>
+            </a:r>
+          </a:p>
+          <a:p>
+            <a:pPr>
+              <a:spcAft>
+                <a:spcPts val="800"/>
+              </a:spcAft>
+              <a:defRPr sz="1500">
+                <a:solidFill>
+                  <a:srgbClr val="94A3B8"/>
+                </a:solidFill>
+              </a:defRPr>
+            </a:pPr>
+            <a:r>
+              <a:t>Quick cash offers before MRI results or specialist referrals return</a:t>
+            </a:r>
+          </a:p>
+          <a:p>
+            <a:pPr>
+              <a:spcAft>
+                <a:spcPts val="800"/>
+              </a:spcAft>
+              <a:defRPr sz="1500">
+                <a:solidFill>
+                  <a:srgbClr val="94A3B8"/>
+                </a:solidFill>
+              </a:defRPr>
+            </a:pPr>
+            <a:r>
+              <a:t>Disputing serious injury thresholds or pre-existing conditions</a:t>
+            </a:r>
+          </a:p>
+          <a:p>
+            <a:pPr>
+              <a:spcAft>
+                <a:spcPts val="800"/>
+              </a:spcAft>
+              <a:defRPr sz="1500">
+                <a:solidFill>
+                  <a:srgbClr val="94A3B8"/>
+                </a:solidFill>
+              </a:defRPr>
+            </a:pPr>
+            <a:r>
+              <a:t>Multiple policies pointing blame at each other (especially in truck and multi-vehicle crashes)</a:t>
+            </a:r>
+          </a:p>
+        </p:txBody>
+      </p:sp>
+    </p:spTree>
+  </p:cSld>
+  <p:clrMapOvr>
+    <a:masterClrMapping/>
+  </p:clrMapOvr>
+</p:sld>
+</file>
+
+<file path=ppt/slides/slide9.xml><?xml version="1.0" encoding="utf-8"?>
+<p:sld xmlns:a="http://schemas.openxmlformats.org/drawingml/2006/main" xmlns:p="http://schemas.openxmlformats.org/presentationml/2006/main" xmlns:r="http://schemas.openxmlformats.org/officeDocument/2006/relationships">
+  <p:cSld>
+    <p:bg>
+      <p:bgPr>
+        <a:solidFill>
+          <a:srgbClr val="0F172A"/>
+        </a:solidFill>
+        <a:effectLst/>
+      </p:bgPr>
+    </p:bg>
+    <p:spTree>
+      <p:nvGrpSpPr>
+        <p:cNvPr id="1" name=""/>
+        <p:cNvGrpSpPr/>
+        <p:nvPr/>
+      </p:nvGrpSpPr>
+      <p:grpSpPr/>
+      <p:sp>
+        <p:nvSpPr>
+          <p:cNvPr id="2" name="Rectangle 1"/>
+          <p:cNvSpPr/>
+          <p:nvPr/>
+        </p:nvSpPr>
+        <p:spPr>
+          <a:xfrm>
+            <a:off x="0" y="0"/>
+            <a:ext cx="109728" cy="6858000"/>
+          </a:xfrm>
+          <a:prstGeom prst="rect">
+            <a:avLst/>
+          </a:prstGeom>
+          <a:solidFill>
+            <a:srgbClr val="CC0000"/>
+          </a:solidFill>
+          <a:ln>
+            <a:noFill/>
+          </a:ln>
+        </p:spPr>
+        <p:style>
+          <a:lnRef idx="1">
+            <a:schemeClr val="accent1"/>
+          </a:lnRef>
+          <a:fillRef idx="3">
+            <a:schemeClr val="accent1"/>
+          </a:fillRef>
+          <a:effectRef idx="2">
+            <a:schemeClr val="accent1"/>
+          </a:effectRef>
+          <a:fontRef idx="minor">
+            <a:schemeClr val="lt1"/>
+          </a:fontRef>
+        </p:style>
+        <p:txBody>
+          <a:bodyPr rtlCol="0" anchor="ctr"/>
+          <a:lstStyle/>
+          <a:p>
+            <a:pPr algn="ctr"/>
+          </a:p>
+        </p:txBody>
+      </p:sp>
+      <p:sp>
+        <p:nvSpPr>
+          <p:cNvPr id="3" name="TextBox 2"/>
+          <p:cNvSpPr txBox="1"/>
+          <p:nvPr/>
+        </p:nvSpPr>
+        <p:spPr>
+          <a:xfrm>
+            <a:off x="411480" y="411480"/>
+            <a:ext cx="8229600" cy="822960"/>
+          </a:xfrm>
+          <a:prstGeom prst="rect">
+            <a:avLst/>
+          </a:prstGeom>
+          <a:noFill/>
+        </p:spPr>
+        <p:txBody>
+          <a:bodyPr wrap="none">
+            <a:spAutoFit/>
+          </a:bodyPr>
+          <a:lstStyle/>
+          <a:p>
+            <a:pPr>
+              <a:defRPr sz="2400" b="1">
+                <a:solidFill>
+                  <a:srgbClr val="FFFFFF"/>
+                </a:solidFill>
+              </a:defRPr>
+            </a:pPr>
+            <a:r>
+              <a:t>When to speak with a lawyer</a:t>
+            </a:r>
+          </a:p>
+        </p:txBody>
+      </p:sp>
+      <p:sp>
+        <p:nvSpPr>
+          <p:cNvPr id="4" name="TextBox 3"/>
+          <p:cNvSpPr txBox="1"/>
+          <p:nvPr/>
+        </p:nvSpPr>
+        <p:spPr>
+          <a:xfrm>
+            <a:off x="502920" y="1234440"/>
+            <a:ext cx="8138160" cy="5029200"/>
+          </a:xfrm>
+          <a:prstGeom prst="rect">
+            <a:avLst/>
+          </a:prstGeom>
+          <a:noFill/>
+        </p:spPr>
+        <p:txBody>
+          <a:bodyPr wrap="square">
+            <a:spAutoFit/>
+          </a:bodyPr>
+          <a:lstStyle/>
+          <a:p>
+            <a:pPr>
+              <a:spcAft>
+                <a:spcPts val="800"/>
+              </a:spcAft>
+              <a:defRPr sz="1500">
+                <a:solidFill>
+                  <a:srgbClr val="94A3B8"/>
+                </a:solidFill>
+              </a:defRPr>
+            </a:pPr>
+            <a:r>
+              <a:t>Consider a free consultation if: hospitalization occurred, fault is disputed, a commercial truck was involved, a death occurred, or an insurer already denied coverage. SemiTruckMatch connects you with participating licensed attorneys — we do not provide legal advice ourselves.</a:t>
             </a:r>
           </a:p>
         </p:txBody>
